--- a/Software Project Management/10.1. Agile Risk Management.pptx
+++ b/Software Project Management/10.1. Agile Risk Management.pptx
@@ -5,10 +5,10 @@
     <p:sldMasterId id="2147483708" r:id="rId1"/>
   </p:sldMasterIdLst>
   <p:notesMasterIdLst>
-    <p:notesMasterId r:id="rId19"/>
+    <p:notesMasterId r:id="rId20"/>
   </p:notesMasterIdLst>
   <p:handoutMasterIdLst>
-    <p:handoutMasterId r:id="rId20"/>
+    <p:handoutMasterId r:id="rId21"/>
   </p:handoutMasterIdLst>
   <p:sldIdLst>
     <p:sldId id="256" r:id="rId2"/>
@@ -21,13 +21,14 @@
     <p:sldId id="514" r:id="rId9"/>
     <p:sldId id="516" r:id="rId10"/>
     <p:sldId id="509" r:id="rId11"/>
-    <p:sldId id="518" r:id="rId12"/>
-    <p:sldId id="510" r:id="rId13"/>
-    <p:sldId id="515" r:id="rId14"/>
-    <p:sldId id="511" r:id="rId15"/>
-    <p:sldId id="512" r:id="rId16"/>
-    <p:sldId id="517" r:id="rId17"/>
-    <p:sldId id="435" r:id="rId18"/>
+    <p:sldId id="520" r:id="rId12"/>
+    <p:sldId id="521" r:id="rId13"/>
+    <p:sldId id="510" r:id="rId14"/>
+    <p:sldId id="515" r:id="rId15"/>
+    <p:sldId id="511" r:id="rId16"/>
+    <p:sldId id="512" r:id="rId17"/>
+    <p:sldId id="517" r:id="rId18"/>
+    <p:sldId id="435" r:id="rId19"/>
   </p:sldIdLst>
   <p:sldSz cx="9144000" cy="6858000" type="screen4x3"/>
   <p:notesSz cx="6858000" cy="9144000"/>
@@ -242,7 +243,7 @@
             <a:fld id="{83A12EEB-C7B7-4C23-8FB7-0A591F49244D}" type="datetimeFigureOut">
               <a:rPr lang="en-US" smtClean="0"/>
               <a:pPr/>
-              <a:t>11/14/2022</a:t>
+              <a:t>7/18/2026</a:t>
             </a:fld>
             <a:endParaRPr lang="en-US"/>
           </a:p>
@@ -404,7 +405,7 @@
             <a:fld id="{C95FFD4D-3F2F-41C7-82E0-EA9E09F0254F}" type="datetimeFigureOut">
               <a:rPr lang="en-US" smtClean="0"/>
               <a:pPr/>
-              <a:t>11/14/2022</a:t>
+              <a:t>7/18/2026</a:t>
             </a:fld>
             <a:endParaRPr lang="en-US"/>
           </a:p>
@@ -738,7 +739,7 @@
             <a:fld id="{B8D599AA-89B5-4E53-9441-A8FD65B04516}" type="slidenum">
               <a:rPr lang="en-US" smtClean="0"/>
               <a:pPr/>
-              <a:t>15</a:t>
+              <a:t>16</a:t>
             </a:fld>
             <a:endParaRPr lang="en-US"/>
           </a:p>
@@ -943,7 +944,7 @@
               <a:pPr>
                 <a:defRPr/>
               </a:pPr>
-              <a:t>11/14/2022</a:t>
+              <a:t>7/18/2026</a:t>
             </a:fld>
             <a:endParaRPr lang="en-US"/>
           </a:p>
@@ -1135,7 +1136,7 @@
               <a:pPr>
                 <a:defRPr/>
               </a:pPr>
-              <a:t>11/14/2022</a:t>
+              <a:t>7/18/2026</a:t>
             </a:fld>
             <a:endParaRPr lang="en-US"/>
           </a:p>
@@ -1337,7 +1338,7 @@
               <a:pPr>
                 <a:defRPr/>
               </a:pPr>
-              <a:t>11/14/2022</a:t>
+              <a:t>7/18/2026</a:t>
             </a:fld>
             <a:endParaRPr lang="en-US"/>
           </a:p>
@@ -1529,7 +1530,7 @@
               <a:pPr>
                 <a:defRPr/>
               </a:pPr>
-              <a:t>11/14/2022</a:t>
+              <a:t>7/18/2026</a:t>
             </a:fld>
             <a:endParaRPr lang="en-US"/>
           </a:p>
@@ -1797,7 +1798,7 @@
               <a:pPr>
                 <a:defRPr/>
               </a:pPr>
-              <a:t>11/14/2022</a:t>
+              <a:t>7/18/2026</a:t>
             </a:fld>
             <a:endParaRPr lang="en-US"/>
           </a:p>
@@ -2107,7 +2108,7 @@
               <a:pPr>
                 <a:defRPr/>
               </a:pPr>
-              <a:t>11/14/2022</a:t>
+              <a:t>7/18/2026</a:t>
             </a:fld>
             <a:endParaRPr lang="en-US"/>
           </a:p>
@@ -2551,7 +2552,7 @@
               <a:pPr>
                 <a:defRPr/>
               </a:pPr>
-              <a:t>11/14/2022</a:t>
+              <a:t>7/18/2026</a:t>
             </a:fld>
             <a:endParaRPr lang="en-US"/>
           </a:p>
@@ -2691,7 +2692,7 @@
               <a:pPr>
                 <a:defRPr/>
               </a:pPr>
-              <a:t>11/14/2022</a:t>
+              <a:t>7/18/2026</a:t>
             </a:fld>
             <a:endParaRPr lang="en-US"/>
           </a:p>
@@ -2808,7 +2809,7 @@
               <a:pPr>
                 <a:defRPr/>
               </a:pPr>
-              <a:t>11/14/2022</a:t>
+              <a:t>7/18/2026</a:t>
             </a:fld>
             <a:endParaRPr lang="en-US"/>
           </a:p>
@@ -3107,7 +3108,7 @@
               <a:pPr>
                 <a:defRPr/>
               </a:pPr>
-              <a:t>11/14/2022</a:t>
+              <a:t>7/18/2026</a:t>
             </a:fld>
             <a:endParaRPr lang="en-US"/>
           </a:p>
@@ -3385,7 +3386,7 @@
               <a:pPr>
                 <a:defRPr/>
               </a:pPr>
-              <a:t>11/14/2022</a:t>
+              <a:t>7/18/2026</a:t>
             </a:fld>
             <a:endParaRPr lang="en-US"/>
           </a:p>
@@ -3633,7 +3634,7 @@
               <a:pPr>
                 <a:defRPr/>
               </a:pPr>
-              <a:t>11/14/2022</a:t>
+              <a:t>7/18/2026</a:t>
             </a:fld>
             <a:endParaRPr lang="en-US"/>
           </a:p>
@@ -4439,7 +4440,11 @@
           <a:p>
             <a:r>
               <a:rPr lang="en-US" dirty="0" smtClean="0"/>
-              <a:t>Previous Classes' Issues</a:t>
+              <a:t>Challenges in Previous Classes </a:t>
+            </a:r>
+            <a:r>
+              <a:rPr lang="en-US" dirty="0" smtClean="0"/>
+              <a:t>(I)</a:t>
             </a:r>
             <a:endParaRPr lang="en-US" dirty="0"/>
           </a:p>
@@ -4462,14 +4467,219 @@
           <a:p>
             <a:r>
               <a:rPr lang="en-US" sz="2400" dirty="0" smtClean="0"/>
+              <a:t>Team members leaving or losing </a:t>
+            </a:r>
+            <a:r>
+              <a:rPr lang="en-US" sz="2400" dirty="0" smtClean="0"/>
+              <a:t>motivation.</a:t>
+            </a:r>
+            <a:endParaRPr lang="en-US" sz="2400" dirty="0" smtClean="0"/>
+          </a:p>
+          <a:p>
+            <a:r>
+              <a:rPr lang="en-US" sz="2400" dirty="0" smtClean="0"/>
+              <a:t>Unclear </a:t>
+            </a:r>
+            <a:r>
+              <a:rPr lang="en-US" sz="2400" dirty="0" smtClean="0"/>
+              <a:t>requirements: Real world problems, domain knowledge.</a:t>
+            </a:r>
+          </a:p>
+          <a:p>
+            <a:r>
+              <a:rPr lang="en-US" sz="2400" dirty="0" smtClean="0"/>
+              <a:t>Availability </a:t>
+            </a:r>
+            <a:r>
+              <a:rPr lang="en-US" sz="2400" dirty="0" smtClean="0"/>
+              <a:t>and </a:t>
+            </a:r>
+            <a:r>
+              <a:rPr lang="en-US" sz="2400" dirty="0" smtClean="0"/>
+              <a:t>cost </a:t>
+            </a:r>
+            <a:r>
+              <a:rPr lang="en-US" sz="2400" dirty="0" smtClean="0"/>
+              <a:t>of </a:t>
+            </a:r>
+            <a:r>
+              <a:rPr lang="en-US" sz="2400" dirty="0" smtClean="0"/>
+              <a:t>reliable </a:t>
+            </a:r>
+            <a:r>
+              <a:rPr lang="en-US" sz="2400" dirty="0" smtClean="0"/>
+              <a:t>AI </a:t>
+            </a:r>
+            <a:r>
+              <a:rPr lang="en-US" sz="2400" dirty="0" smtClean="0"/>
+              <a:t>coding agents.</a:t>
+            </a:r>
+          </a:p>
+          <a:p>
+            <a:r>
+              <a:rPr lang="en-US" sz="2400" dirty="0" smtClean="0"/>
+              <a:t>Earlier </a:t>
+            </a:r>
+            <a:r>
+              <a:rPr lang="en-US" sz="2400" dirty="0" smtClean="0"/>
+              <a:t>releases </a:t>
+            </a:r>
+            <a:r>
+              <a:rPr lang="en-US" sz="2400" dirty="0" smtClean="0"/>
+              <a:t>from </a:t>
+            </a:r>
+            <a:r>
+              <a:rPr lang="en-US" sz="2400" dirty="0" smtClean="0"/>
+              <a:t>competitors.</a:t>
+            </a:r>
+            <a:endParaRPr lang="en-US" sz="2400" dirty="0"/>
+          </a:p>
+        </p:txBody>
+      </p:sp>
+      <p:sp>
+        <p:nvSpPr>
+          <p:cNvPr id="1026" name="AutoShape 2" descr="https://now.fordham.edu/wp-content/uploads/2025/09/Group-Projects-1280.jpg"/>
+          <p:cNvSpPr>
+            <a:spLocks noChangeAspect="1" noChangeArrowheads="1"/>
+          </p:cNvSpPr>
+          <p:nvPr/>
+        </p:nvSpPr>
+        <p:spPr bwMode="auto">
+          <a:xfrm>
+            <a:off x="155575" y="-2719388"/>
+            <a:ext cx="10077450" cy="5667376"/>
+          </a:xfrm>
+          <a:prstGeom prst="rect">
+            <a:avLst/>
+          </a:prstGeom>
+          <a:noFill/>
+        </p:spPr>
+        <p:txBody>
+          <a:bodyPr vert="horz" wrap="square" lIns="91440" tIns="45720" rIns="91440" bIns="45720" numCol="1" anchor="t" anchorCtr="0" compatLnSpc="1">
+            <a:prstTxWarp prst="textNoShape">
+              <a:avLst/>
+            </a:prstTxWarp>
+          </a:bodyPr>
+          <a:lstStyle/>
+          <a:p>
+            <a:endParaRPr lang="en-US"/>
+          </a:p>
+        </p:txBody>
+      </p:sp>
+      <p:pic>
+        <p:nvPicPr>
+          <p:cNvPr id="1027" name="Picture 3"/>
+          <p:cNvPicPr>
+            <a:picLocks noChangeAspect="1" noChangeArrowheads="1"/>
+          </p:cNvPicPr>
+          <p:nvPr/>
+        </p:nvPicPr>
+        <p:blipFill>
+          <a:blip r:embed="rId2" cstate="print"/>
+          <a:srcRect/>
+          <a:stretch>
+            <a:fillRect/>
+          </a:stretch>
+        </p:blipFill>
+        <p:spPr bwMode="auto">
+          <a:xfrm>
+            <a:off x="2540000" y="3962400"/>
+            <a:ext cx="4064000" cy="2286000"/>
+          </a:xfrm>
+          <a:prstGeom prst="rect">
+            <a:avLst/>
+          </a:prstGeom>
+          <a:noFill/>
+          <a:ln w="9525">
+            <a:noFill/>
+            <a:miter lim="800000"/>
+            <a:headEnd/>
+            <a:tailEnd/>
+          </a:ln>
+        </p:spPr>
+      </p:pic>
+    </p:spTree>
+  </p:cSld>
+  <p:clrMapOvr>
+    <a:masterClrMapping/>
+  </p:clrMapOvr>
+</p:sld>
+</file>
+
+<file path=ppt/slides/slide12.xml><?xml version="1.0" encoding="utf-8"?>
+<p:sld xmlns:a="http://schemas.openxmlformats.org/drawingml/2006/main" xmlns:r="http://schemas.openxmlformats.org/officeDocument/2006/relationships" xmlns:p="http://schemas.openxmlformats.org/presentationml/2006/main">
+  <p:cSld>
+    <p:spTree>
+      <p:nvGrpSpPr>
+        <p:cNvPr id="1" name=""/>
+        <p:cNvGrpSpPr/>
+        <p:nvPr/>
+      </p:nvGrpSpPr>
+      <p:grpSpPr>
+        <a:xfrm>
+          <a:off x="0" y="0"/>
+          <a:ext cx="0" cy="0"/>
+          <a:chOff x="0" y="0"/>
+          <a:chExt cx="0" cy="0"/>
+        </a:xfrm>
+      </p:grpSpPr>
+      <p:sp>
+        <p:nvSpPr>
+          <p:cNvPr id="2" name="Title 1"/>
+          <p:cNvSpPr>
+            <a:spLocks noGrp="1"/>
+          </p:cNvSpPr>
+          <p:nvPr>
+            <p:ph type="title"/>
+          </p:nvPr>
+        </p:nvSpPr>
+        <p:spPr/>
+        <p:txBody>
+          <a:bodyPr/>
+          <a:lstStyle/>
+          <a:p>
+            <a:r>
+              <a:rPr lang="en-US" dirty="0" smtClean="0"/>
+              <a:t>Challenges in Previous </a:t>
+            </a:r>
+            <a:r>
+              <a:rPr lang="en-US" dirty="0" smtClean="0"/>
+              <a:t>Classes (II)</a:t>
+            </a:r>
+            <a:endParaRPr lang="en-US" dirty="0"/>
+          </a:p>
+        </p:txBody>
+      </p:sp>
+      <p:sp>
+        <p:nvSpPr>
+          <p:cNvPr id="3" name="Content Placeholder 2"/>
+          <p:cNvSpPr>
+            <a:spLocks noGrp="1"/>
+          </p:cNvSpPr>
+          <p:nvPr>
+            <p:ph idx="1"/>
+          </p:nvPr>
+        </p:nvSpPr>
+        <p:spPr/>
+        <p:txBody>
+          <a:bodyPr/>
+          <a:lstStyle/>
+          <a:p>
+            <a:r>
+              <a:rPr lang="en-US" sz="2400" dirty="0" smtClean="0"/>
               <a:t>Not enough time</a:t>
             </a:r>
           </a:p>
           <a:p>
             <a:r>
               <a:rPr lang="en-US" sz="2400" dirty="0" smtClean="0"/>
-              <a:t>Working on new technology</a:t>
-            </a:r>
+              <a:t>Working on new </a:t>
+            </a:r>
+            <a:r>
+              <a:rPr lang="en-US" sz="2400" dirty="0" smtClean="0"/>
+              <a:t>technologies</a:t>
+            </a:r>
+            <a:endParaRPr lang="en-US" sz="2400" dirty="0" smtClean="0"/>
           </a:p>
           <a:p>
             <a:r>
@@ -4528,7 +4738,7 @@
 </p:sld>
 </file>
 
-<file path=ppt/slides/slide12.xml><?xml version="1.0" encoding="utf-8"?>
+<file path=ppt/slides/slide13.xml><?xml version="1.0" encoding="utf-8"?>
 <p:sld xmlns:a="http://schemas.openxmlformats.org/drawingml/2006/main" xmlns:r="http://schemas.openxmlformats.org/officeDocument/2006/relationships" xmlns:p="http://schemas.openxmlformats.org/presentationml/2006/main">
   <p:cSld>
     <p:spTree>
@@ -4690,7 +4900,7 @@
 </p:sld>
 </file>
 
-<file path=ppt/slides/slide13.xml><?xml version="1.0" encoding="utf-8"?>
+<file path=ppt/slides/slide14.xml><?xml version="1.0" encoding="utf-8"?>
 <p:sld xmlns:a="http://schemas.openxmlformats.org/drawingml/2006/main" xmlns:r="http://schemas.openxmlformats.org/officeDocument/2006/relationships" xmlns:p="http://schemas.openxmlformats.org/presentationml/2006/main">
   <p:cSld>
     <p:spTree>
@@ -4791,7 +5001,7 @@
 </p:sld>
 </file>
 
-<file path=ppt/slides/slide14.xml><?xml version="1.0" encoding="utf-8"?>
+<file path=ppt/slides/slide15.xml><?xml version="1.0" encoding="utf-8"?>
 <p:sld xmlns:a="http://schemas.openxmlformats.org/drawingml/2006/main" xmlns:r="http://schemas.openxmlformats.org/officeDocument/2006/relationships" xmlns:p="http://schemas.openxmlformats.org/presentationml/2006/main">
   <p:cSld>
     <p:spTree>
@@ -4951,7 +5161,7 @@
 </p:sld>
 </file>
 
-<file path=ppt/slides/slide15.xml><?xml version="1.0" encoding="utf-8"?>
+<file path=ppt/slides/slide16.xml><?xml version="1.0" encoding="utf-8"?>
 <p:sld xmlns:a="http://schemas.openxmlformats.org/drawingml/2006/main" xmlns:r="http://schemas.openxmlformats.org/officeDocument/2006/relationships" xmlns:p="http://schemas.openxmlformats.org/presentationml/2006/main">
   <p:cSld>
     <p:spTree>
@@ -5121,7 +5331,7 @@
 </p:sld>
 </file>
 
-<file path=ppt/slides/slide16.xml><?xml version="1.0" encoding="utf-8"?>
+<file path=ppt/slides/slide17.xml><?xml version="1.0" encoding="utf-8"?>
 <p:sld xmlns:a="http://schemas.openxmlformats.org/drawingml/2006/main" xmlns:r="http://schemas.openxmlformats.org/officeDocument/2006/relationships" xmlns:p="http://schemas.openxmlformats.org/presentationml/2006/main">
   <p:cSld>
     <p:spTree>
@@ -5197,8 +5407,13 @@
           <a:p>
             <a:r>
               <a:rPr lang="en-US" sz="2800" dirty="0" smtClean="0"/>
-              <a:t>Working on new technology</a:t>
-            </a:r>
+              <a:t>Working on new </a:t>
+            </a:r>
+            <a:r>
+              <a:rPr lang="en-US" sz="2800" dirty="0" smtClean="0"/>
+              <a:t>technologies</a:t>
+            </a:r>
+            <a:endParaRPr lang="en-US" sz="2800" dirty="0" smtClean="0"/>
           </a:p>
           <a:p>
             <a:pPr lvl="1"/>
@@ -5259,7 +5474,7 @@
         </p:blipFill>
         <p:spPr bwMode="auto">
           <a:xfrm>
-            <a:off x="5359400" y="2514600"/>
+            <a:off x="5435600" y="2514600"/>
             <a:ext cx="3175000" cy="2116138"/>
           </a:xfrm>
           <a:prstGeom prst="rect">
@@ -5276,7 +5491,7 @@
 </p:sld>
 </file>
 
-<file path=ppt/slides/slide17.xml><?xml version="1.0" encoding="utf-8"?>
+<file path=ppt/slides/slide18.xml><?xml version="1.0" encoding="utf-8"?>
 <p:sld xmlns:a="http://schemas.openxmlformats.org/drawingml/2006/main" xmlns:r="http://schemas.openxmlformats.org/officeDocument/2006/relationships" xmlns:p="http://schemas.openxmlformats.org/presentationml/2006/main">
   <p:cSld>
     <p:spTree>
